--- a/public/fun/cards/public/public-25.pptx
+++ b/public/fun/cards/public/public-25.pptx
@@ -3085,7 +3085,7 @@
     <p:bg>
       <p:bgPr>
         <a:solidFill>
-          <a:srgbClr val="FBF8F2"/>
+          <a:srgbClr val="EDFBF0"/>
         </a:solidFill>
         <a:effectLst/>
       </p:bgPr>
@@ -3099,72 +3099,14 @@
       <p:grpSpPr/>
       <p:sp>
         <p:nvSpPr>
-          <p:cNvPr id="2" name="Oval 1"/>
-          <p:cNvSpPr/>
+          <p:cNvPr id="2" name="텍스트"/>
+          <p:cNvSpPr txBox="1"/>
           <p:nvPr/>
         </p:nvSpPr>
         <p:spPr>
           <a:xfrm>
-            <a:off x="187200" y="403200"/>
-            <a:ext cx="993600" cy="993600"/>
-          </a:xfrm>
-          <a:prstGeom prst="ellipse">
-            <a:avLst/>
-          </a:prstGeom>
-          <a:noFill/>
-          <a:ln w="14400">
-            <a:solidFill>
-              <a:srgbClr val="C8E0D0"/>
-            </a:solidFill>
-          </a:ln>
-        </p:spPr>
-        <p:txBody>
-          <a:bodyPr rtlCol="0" anchor="ctr"/>
-          <a:lstStyle/>
-          <a:p>
-            <a:pPr algn="ctr"/>
-          </a:p>
-        </p:txBody>
-      </p:sp>
-      <p:sp>
-        <p:nvSpPr>
-          <p:cNvPr id="3" name="Oval 2"/>
-          <p:cNvSpPr/>
-          <p:nvPr/>
-        </p:nvSpPr>
-        <p:spPr>
-          <a:xfrm>
-            <a:off x="259200" y="475200"/>
-            <a:ext cx="849600" cy="849600"/>
-          </a:xfrm>
-          <a:prstGeom prst="ellipse">
-            <a:avLst/>
-          </a:prstGeom>
-          <a:solidFill>
-            <a:srgbClr val="3B9158"/>
-          </a:solidFill>
-          <a:ln>
-            <a:noFill/>
-          </a:ln>
-        </p:spPr>
-        <p:txBody>
-          <a:bodyPr rtlCol="0" anchor="ctr"/>
-          <a:lstStyle/>
-          <a:p>
-            <a:pPr algn="ctr"/>
-          </a:p>
-        </p:txBody>
-      </p:sp>
-      <p:sp>
-        <p:nvSpPr>
-          <p:cNvPr id="4" name="텍스트"/>
-          <p:cNvSpPr txBox="1"/>
-          <p:nvPr/>
-        </p:nvSpPr>
-        <p:spPr>
-          <a:xfrm>
-            <a:off x="259200" y="612000"/>
-            <a:ext cx="849600" cy="576000"/>
+            <a:off x="252000" y="223200"/>
+            <a:ext cx="2016000" cy="133351"/>
           </a:xfrm>
           <a:prstGeom prst="rect">
             <a:avLst/>
@@ -3172,39 +3114,68 @@
           <a:noFill/>
         </p:spPr>
         <p:txBody>
-          <a:bodyPr wrap="square" lIns="0" rIns="0" tIns="0" bIns="0" anchor="ctr">
+          <a:bodyPr wrap="square" lIns="0" rIns="0" tIns="0" bIns="0" anchor="t">
             <a:spAutoFit/>
           </a:bodyPr>
           <a:lstStyle/>
           <a:p>
-            <a:pPr algn="ctr">
+            <a:pPr algn="l">
               <a:lnSpc>
-                <a:spcPts val="6959"/>
+                <a:spcPts val="1015"/>
               </a:lnSpc>
             </a:pPr>
             <a:r>
-              <a:rPr sz="4800" b="1">
+              <a:rPr sz="700" b="1" spc="200">
                 <a:solidFill>
-                  <a:srgbClr val="FFFFFF"/>
+                  <a:srgbClr val="285F37"/>
                 </a:solidFill>
                 <a:latin typeface="맑은 고딕"/>
                 <a:ea typeface="맑은 고딕"/>
               </a:rPr>
-              <a:t>고</a:t>
-            </a:r>
-          </a:p>
-        </p:txBody>
-      </p:sp>
-      <p:sp>
-        <p:nvSpPr>
-          <p:cNvPr id="5" name="텍스트"/>
+              <a:t>기관명 · 부서명</a:t>
+            </a:r>
+          </a:p>
+        </p:txBody>
+      </p:sp>
+      <p:sp>
+        <p:nvSpPr>
+          <p:cNvPr id="3" name="Oval 2"/>
+          <p:cNvSpPr/>
+          <p:nvPr/>
+        </p:nvSpPr>
+        <p:spPr>
+          <a:xfrm>
+            <a:off x="2955600" y="241200"/>
+            <a:ext cx="64800" cy="64800"/>
+          </a:xfrm>
+          <a:prstGeom prst="ellipse">
+            <a:avLst/>
+          </a:prstGeom>
+          <a:solidFill>
+            <a:srgbClr val="4CD964"/>
+          </a:solidFill>
+          <a:ln>
+            <a:noFill/>
+          </a:ln>
+        </p:spPr>
+        <p:txBody>
+          <a:bodyPr rtlCol="0" anchor="ctr"/>
+          <a:lstStyle/>
+          <a:p>
+            <a:pPr algn="ctr"/>
+          </a:p>
+        </p:txBody>
+      </p:sp>
+      <p:sp>
+        <p:nvSpPr>
+          <p:cNvPr id="4" name="텍스트"/>
           <p:cNvSpPr txBox="1"/>
           <p:nvPr/>
         </p:nvSpPr>
         <p:spPr>
           <a:xfrm>
-            <a:off x="1332000" y="223200"/>
-            <a:ext cx="1728000" cy="100800"/>
+            <a:off x="252000" y="676800"/>
+            <a:ext cx="2520000" cy="360000"/>
           </a:xfrm>
           <a:prstGeom prst="rect">
             <a:avLst/>
@@ -3219,32 +3190,32 @@
           <a:p>
             <a:pPr algn="l">
               <a:lnSpc>
-                <a:spcPts val="1087"/>
+                <a:spcPts val="3190"/>
               </a:lnSpc>
             </a:pPr>
             <a:r>
-              <a:rPr sz="750" b="1" spc="150">
+              <a:rPr sz="2200" b="1">
                 <a:solidFill>
-                  <a:srgbClr val="966068"/>
+                  <a:srgbClr val="12151C"/>
                 </a:solidFill>
                 <a:latin typeface="맑은 고딕"/>
                 <a:ea typeface="맑은 고딕"/>
               </a:rPr>
-              <a:t>기관명 · 부서명</a:t>
-            </a:r>
-          </a:p>
-        </p:txBody>
-      </p:sp>
-      <p:sp>
-        <p:nvSpPr>
-          <p:cNvPr id="6" name="텍스트"/>
+              <a:t>고은채</a:t>
+            </a:r>
+          </a:p>
+        </p:txBody>
+      </p:sp>
+      <p:sp>
+        <p:nvSpPr>
+          <p:cNvPr id="5" name="텍스트"/>
           <p:cNvSpPr txBox="1"/>
           <p:nvPr/>
         </p:nvSpPr>
         <p:spPr>
           <a:xfrm>
-            <a:off x="1332000" y="424800"/>
-            <a:ext cx="1728000" cy="297182"/>
+            <a:off x="252000" y="1080000"/>
+            <a:ext cx="2520000" cy="171451"/>
           </a:xfrm>
           <a:prstGeom prst="rect">
             <a:avLst/>
@@ -3259,22 +3230,43 @@
           <a:p>
             <a:pPr algn="l">
               <a:lnSpc>
-                <a:spcPts val="2610"/>
+                <a:spcPts val="1305"/>
               </a:lnSpc>
             </a:pPr>
             <a:r>
-              <a:rPr sz="1800" b="1" spc="50">
+              <a:rPr sz="900" b="0">
                 <a:solidFill>
-                  <a:srgbClr val="7A1F2E"/>
+                  <a:srgbClr val="285F37"/>
                 </a:solidFill>
                 <a:latin typeface="맑은 고딕"/>
                 <a:ea typeface="맑은 고딕"/>
               </a:rPr>
-              <a:t>고은채</a:t>
-            </a:r>
-          </a:p>
-        </p:txBody>
-      </p:sp>
+              <a:t>담당관</a:t>
+            </a:r>
+          </a:p>
+        </p:txBody>
+      </p:sp>
+      <p:cxnSp>
+        <p:nvCxnSpPr>
+          <p:cNvPr id="6" name="Connector 5"/>
+          <p:cNvCxnSpPr/>
+          <p:nvPr/>
+        </p:nvCxnSpPr>
+        <p:spPr>
+          <a:xfrm>
+            <a:off x="252000" y="1339200"/>
+            <a:ext cx="2736000" cy="0"/>
+          </a:xfrm>
+          <a:prstGeom prst="line">
+            <a:avLst/>
+          </a:prstGeom>
+          <a:ln w="5760">
+            <a:solidFill>
+              <a:srgbClr val="CDF4D4"/>
+            </a:solidFill>
+          </a:ln>
+        </p:spPr>
+      </p:cxnSp>
       <p:sp>
         <p:nvSpPr>
           <p:cNvPr id="7" name="텍스트"/>
@@ -3283,8 +3275,8 @@
         </p:nvSpPr>
         <p:spPr>
           <a:xfrm>
-            <a:off x="1332000" y="705600"/>
-            <a:ext cx="1728000" cy="122400"/>
+            <a:off x="252000" y="1411200"/>
+            <a:ext cx="792000" cy="129541"/>
           </a:xfrm>
           <a:prstGeom prst="rect">
             <a:avLst/>
@@ -3299,61 +3291,32 @@
           <a:p>
             <a:pPr algn="l">
               <a:lnSpc>
-                <a:spcPts val="1232"/>
+                <a:spcPts val="986"/>
               </a:lnSpc>
             </a:pPr>
             <a:r>
-              <a:rPr sz="850" b="1">
+              <a:rPr sz="680" b="0">
                 <a:solidFill>
-                  <a:srgbClr val="327B4B"/>
+                  <a:srgbClr val="12151C"/>
                 </a:solidFill>
                 <a:latin typeface="맑은 고딕"/>
                 <a:ea typeface="맑은 고딕"/>
               </a:rPr>
-              <a:t>담당관</a:t>
-            </a:r>
-          </a:p>
-        </p:txBody>
-      </p:sp>
-      <p:sp>
-        <p:nvSpPr>
-          <p:cNvPr id="8" name="Rectangle 7"/>
-          <p:cNvSpPr/>
+              <a:t>010-1234-5678</a:t>
+            </a:r>
+          </a:p>
+        </p:txBody>
+      </p:sp>
+      <p:sp>
+        <p:nvSpPr>
+          <p:cNvPr id="8" name="텍스트"/>
+          <p:cNvSpPr txBox="1"/>
           <p:nvPr/>
         </p:nvSpPr>
         <p:spPr>
           <a:xfrm>
-            <a:off x="1332000" y="907200"/>
-            <a:ext cx="201600" cy="14400"/>
-          </a:xfrm>
-          <a:prstGeom prst="rect">
-            <a:avLst/>
-          </a:prstGeom>
-          <a:solidFill>
-            <a:srgbClr val="3B9158"/>
-          </a:solidFill>
-          <a:ln>
-            <a:noFill/>
-          </a:ln>
-        </p:spPr>
-        <p:txBody>
-          <a:bodyPr rtlCol="0" anchor="ctr"/>
-          <a:lstStyle/>
-          <a:p>
-            <a:pPr algn="ctr"/>
-          </a:p>
-        </p:txBody>
-      </p:sp>
-      <p:sp>
-        <p:nvSpPr>
-          <p:cNvPr id="9" name="텍스트"/>
-          <p:cNvSpPr txBox="1"/>
-          <p:nvPr/>
-        </p:nvSpPr>
-        <p:spPr>
-          <a:xfrm>
-            <a:off x="1332000" y="1051200"/>
-            <a:ext cx="122400" cy="168911"/>
+            <a:off x="1080000" y="1411200"/>
+            <a:ext cx="900000" cy="129541"/>
           </a:xfrm>
           <a:prstGeom prst="rect">
             <a:avLst/>
@@ -3368,32 +3331,32 @@
           <a:p>
             <a:pPr algn="l">
               <a:lnSpc>
-                <a:spcPts val="1015"/>
+                <a:spcPts val="986"/>
               </a:lnSpc>
             </a:pPr>
             <a:r>
-              <a:rPr sz="700" b="1">
+              <a:rPr sz="680" b="0">
                 <a:solidFill>
-                  <a:srgbClr val="327B4B"/>
+                  <a:srgbClr val="12151C"/>
                 </a:solidFill>
                 <a:latin typeface="맑은 고딕"/>
                 <a:ea typeface="맑은 고딕"/>
               </a:rPr>
-              <a:t>T</a:t>
-            </a:r>
-          </a:p>
-        </p:txBody>
-      </p:sp>
-      <p:sp>
-        <p:nvSpPr>
-          <p:cNvPr id="10" name="텍스트"/>
+              <a:t>name@example.com</a:t>
+            </a:r>
+          </a:p>
+        </p:txBody>
+      </p:sp>
+      <p:sp>
+        <p:nvSpPr>
+          <p:cNvPr id="9" name="텍스트"/>
           <p:cNvSpPr txBox="1"/>
           <p:nvPr/>
         </p:nvSpPr>
         <p:spPr>
           <a:xfrm>
-            <a:off x="1476000" y="1051200"/>
-            <a:ext cx="1584000" cy="168911"/>
+            <a:off x="2052000" y="1411200"/>
+            <a:ext cx="972000" cy="129541"/>
           </a:xfrm>
           <a:prstGeom prst="rect">
             <a:avLst/>
@@ -3408,32 +3371,32 @@
           <a:p>
             <a:pPr algn="l">
               <a:lnSpc>
-                <a:spcPts val="1015"/>
+                <a:spcPts val="986"/>
               </a:lnSpc>
             </a:pPr>
             <a:r>
-              <a:rPr sz="700" b="0">
+              <a:rPr sz="680" b="0">
                 <a:solidFill>
-                  <a:srgbClr val="7A1F2E"/>
+                  <a:srgbClr val="12151C"/>
                 </a:solidFill>
                 <a:latin typeface="맑은 고딕"/>
                 <a:ea typeface="맑은 고딕"/>
               </a:rPr>
-              <a:t>010-1234-5678</a:t>
-            </a:r>
-          </a:p>
-        </p:txBody>
-      </p:sp>
-      <p:sp>
-        <p:nvSpPr>
-          <p:cNvPr id="11" name="텍스트"/>
+              <a:t>주소를 입력해 주세요</a:t>
+            </a:r>
+          </a:p>
+        </p:txBody>
+      </p:sp>
+      <p:sp>
+        <p:nvSpPr>
+          <p:cNvPr id="10" name="텍스트"/>
           <p:cNvSpPr txBox="1"/>
           <p:nvPr/>
         </p:nvSpPr>
         <p:spPr>
           <a:xfrm>
-            <a:off x="1332000" y="1220111"/>
-            <a:ext cx="122400" cy="168911"/>
+            <a:off x="252000" y="1526400"/>
+            <a:ext cx="216000" cy="95251"/>
           </a:xfrm>
           <a:prstGeom prst="rect">
             <a:avLst/>
@@ -3448,32 +3411,32 @@
           <a:p>
             <a:pPr algn="l">
               <a:lnSpc>
-                <a:spcPts val="1015"/>
+                <a:spcPts val="725"/>
               </a:lnSpc>
             </a:pPr>
             <a:r>
-              <a:rPr sz="700" b="1">
+              <a:rPr sz="500" b="1" spc="120">
                 <a:solidFill>
-                  <a:srgbClr val="327B4B"/>
+                  <a:srgbClr val="285F37"/>
                 </a:solidFill>
                 <a:latin typeface="맑은 고딕"/>
                 <a:ea typeface="맑은 고딕"/>
               </a:rPr>
-              <a:t>E</a:t>
-            </a:r>
-          </a:p>
-        </p:txBody>
-      </p:sp>
-      <p:sp>
-        <p:nvSpPr>
-          <p:cNvPr id="12" name="텍스트"/>
+              <a:t>TEL</a:t>
+            </a:r>
+          </a:p>
+        </p:txBody>
+      </p:sp>
+      <p:sp>
+        <p:nvSpPr>
+          <p:cNvPr id="11" name="텍스트"/>
           <p:cNvSpPr txBox="1"/>
           <p:nvPr/>
         </p:nvSpPr>
         <p:spPr>
           <a:xfrm>
-            <a:off x="1476000" y="1220111"/>
-            <a:ext cx="1584000" cy="168911"/>
+            <a:off x="1080000" y="1526400"/>
+            <a:ext cx="216000" cy="95251"/>
           </a:xfrm>
           <a:prstGeom prst="rect">
             <a:avLst/>
@@ -3488,32 +3451,32 @@
           <a:p>
             <a:pPr algn="l">
               <a:lnSpc>
-                <a:spcPts val="1015"/>
+                <a:spcPts val="725"/>
               </a:lnSpc>
             </a:pPr>
             <a:r>
-              <a:rPr sz="700" b="0">
+              <a:rPr sz="500" b="1" spc="120">
                 <a:solidFill>
-                  <a:srgbClr val="7A1F2E"/>
+                  <a:srgbClr val="285F37"/>
                 </a:solidFill>
                 <a:latin typeface="맑은 고딕"/>
                 <a:ea typeface="맑은 고딕"/>
               </a:rPr>
-              <a:t>name@example.com</a:t>
-            </a:r>
-          </a:p>
-        </p:txBody>
-      </p:sp>
-      <p:sp>
-        <p:nvSpPr>
-          <p:cNvPr id="13" name="텍스트"/>
+              <a:t>MAIL</a:t>
+            </a:r>
+          </a:p>
+        </p:txBody>
+      </p:sp>
+      <p:sp>
+        <p:nvSpPr>
+          <p:cNvPr id="12" name="텍스트"/>
           <p:cNvSpPr txBox="1"/>
           <p:nvPr/>
         </p:nvSpPr>
         <p:spPr>
           <a:xfrm>
-            <a:off x="1332000" y="1389022"/>
-            <a:ext cx="122400" cy="168911"/>
+            <a:off x="2052000" y="1526400"/>
+            <a:ext cx="216000" cy="95251"/>
           </a:xfrm>
           <a:prstGeom prst="rect">
             <a:avLst/>
@@ -3528,58 +3491,18 @@
           <a:p>
             <a:pPr algn="l">
               <a:lnSpc>
-                <a:spcPts val="1015"/>
+                <a:spcPts val="725"/>
               </a:lnSpc>
             </a:pPr>
             <a:r>
-              <a:rPr sz="700" b="1">
+              <a:rPr sz="500" b="1" spc="120">
                 <a:solidFill>
-                  <a:srgbClr val="327B4B"/>
+                  <a:srgbClr val="285F37"/>
                 </a:solidFill>
                 <a:latin typeface="맑은 고딕"/>
                 <a:ea typeface="맑은 고딕"/>
               </a:rPr>
-              <a:t>A</a:t>
-            </a:r>
-          </a:p>
-        </p:txBody>
-      </p:sp>
-      <p:sp>
-        <p:nvSpPr>
-          <p:cNvPr id="14" name="텍스트"/>
-          <p:cNvSpPr txBox="1"/>
-          <p:nvPr/>
-        </p:nvSpPr>
-        <p:spPr>
-          <a:xfrm>
-            <a:off x="1476000" y="1389022"/>
-            <a:ext cx="1584000" cy="168911"/>
-          </a:xfrm>
-          <a:prstGeom prst="rect">
-            <a:avLst/>
-          </a:prstGeom>
-          <a:noFill/>
-        </p:spPr>
-        <p:txBody>
-          <a:bodyPr wrap="square" lIns="0" rIns="0" tIns="0" bIns="0" anchor="t">
-            <a:spAutoFit/>
-          </a:bodyPr>
-          <a:lstStyle/>
-          <a:p>
-            <a:pPr algn="l">
-              <a:lnSpc>
-                <a:spcPts val="1015"/>
-              </a:lnSpc>
-            </a:pPr>
-            <a:r>
-              <a:rPr sz="700" b="0">
-                <a:solidFill>
-                  <a:srgbClr val="7A1F2E"/>
-                </a:solidFill>
-                <a:latin typeface="맑은 고딕"/>
-                <a:ea typeface="맑은 고딕"/>
-              </a:rPr>
-              <a:t>주소를 입력해 주세요</a:t>
+              <a:t>ADDR</a:t>
             </a:r>
           </a:p>
         </p:txBody>
@@ -3598,7 +3521,7 @@
     <p:bg>
       <p:bgPr>
         <a:solidFill>
-          <a:srgbClr val="FFFFFF"/>
+          <a:srgbClr val="F3F4F6"/>
         </a:solidFill>
         <a:effectLst/>
       </p:bgPr>
@@ -3618,17 +3541,18 @@
         </p:nvSpPr>
         <p:spPr>
           <a:xfrm>
-            <a:off x="108000" y="108000"/>
-            <a:ext cx="3024000" cy="1584000"/>
+            <a:off x="2304000" y="504000"/>
+            <a:ext cx="684000" cy="684000"/>
           </a:xfrm>
           <a:prstGeom prst="rect">
             <a:avLst/>
           </a:prstGeom>
           <a:noFill/>
-          <a:ln w="10800">
+          <a:ln w="7200">
             <a:solidFill>
-              <a:srgbClr val="CC334D"/>
+              <a:srgbClr val="6B7280"/>
             </a:solidFill>
+            <a:prstDash val="dash"/>
           </a:ln>
         </p:spPr>
         <p:txBody>
@@ -3647,8 +3571,8 @@
         </p:nvSpPr>
         <p:spPr>
           <a:xfrm>
-            <a:off x="396000" y="504000"/>
-            <a:ext cx="2448000" cy="432000"/>
+            <a:off x="2304000" y="504000"/>
+            <a:ext cx="684000" cy="684000"/>
           </a:xfrm>
           <a:prstGeom prst="rect">
             <a:avLst/>
@@ -3663,82 +3587,32 @@
           <a:p>
             <a:pPr algn="ctr">
               <a:lnSpc>
-                <a:spcPts val="1739"/>
+                <a:spcPts val="1595"/>
               </a:lnSpc>
             </a:pPr>
             <a:r>
-              <a:rPr sz="1200" b="1">
+              <a:rPr sz="1100" b="1">
                 <a:solidFill>
-                  <a:srgbClr val="7A1F2E"/>
+                  <a:srgbClr val="6B7280"/>
                 </a:solidFill>
                 <a:latin typeface="맑은 고딕"/>
                 <a:ea typeface="맑은 고딕"/>
               </a:rPr>
-              <a:t>묵묵한 성실로 보답하겠습니다</a:t>
-            </a:r>
-          </a:p>
-        </p:txBody>
-      </p:sp>
-      <p:cxnSp>
-        <p:nvCxnSpPr>
-          <p:cNvPr id="4" name="Connector 3"/>
-          <p:cNvCxnSpPr/>
+              <a:t>QR</a:t>
+            </a:r>
+          </a:p>
+        </p:txBody>
+      </p:sp>
+      <p:sp>
+        <p:nvSpPr>
+          <p:cNvPr id="4" name="텍스트"/>
+          <p:cNvSpPr txBox="1"/>
           <p:nvPr/>
-        </p:nvCxnSpPr>
+        </p:nvSpPr>
         <p:spPr>
           <a:xfrm>
-            <a:off x="1260000" y="1080000"/>
-            <a:ext cx="684000" cy="0"/>
-          </a:xfrm>
-          <a:prstGeom prst="line">
-            <a:avLst/>
-          </a:prstGeom>
-          <a:ln w="7200">
-            <a:solidFill>
-              <a:srgbClr val="CC334D"/>
-            </a:solidFill>
-          </a:ln>
-        </p:spPr>
-      </p:cxnSp>
-      <p:sp>
-        <p:nvSpPr>
-          <p:cNvPr id="5" name="Oval 4"/>
-          <p:cNvSpPr/>
-          <p:nvPr/>
-        </p:nvSpPr>
-        <p:spPr>
-          <a:xfrm>
-            <a:off x="1594800" y="1054800"/>
-            <a:ext cx="50400" cy="50400"/>
-          </a:xfrm>
-          <a:prstGeom prst="ellipse">
-            <a:avLst/>
-          </a:prstGeom>
-          <a:solidFill>
-            <a:srgbClr val="CC334D"/>
-          </a:solidFill>
-          <a:ln>
-            <a:noFill/>
-          </a:ln>
-        </p:spPr>
-        <p:txBody>
-          <a:bodyPr rtlCol="0" anchor="ctr"/>
-          <a:lstStyle/>
-          <a:p>
-            <a:pPr algn="ctr"/>
-          </a:p>
-        </p:txBody>
-      </p:sp>
-      <p:sp>
-        <p:nvSpPr>
-          <p:cNvPr id="6" name="텍스트"/>
-          <p:cNvSpPr txBox="1"/>
-          <p:nvPr/>
-        </p:nvSpPr>
-        <p:spPr>
-          <a:xfrm>
-            <a:off x="360000" y="1224000"/>
-            <a:ext cx="2520000" cy="108000"/>
+            <a:off x="252000" y="504000"/>
+            <a:ext cx="1728000" cy="720000"/>
           </a:xfrm>
           <a:prstGeom prst="rect">
             <a:avLst/>
@@ -3751,15 +3625,101 @@
           </a:bodyPr>
           <a:lstStyle/>
           <a:p>
-            <a:pPr algn="ctr">
+            <a:pPr algn="l">
               <a:lnSpc>
-                <a:spcPts val="1087"/>
+                <a:spcPts val="1739"/>
               </a:lnSpc>
             </a:pPr>
             <a:r>
-              <a:rPr sz="750" b="1" spc="300">
+              <a:rPr sz="1200" b="1">
                 <a:solidFill>
-                  <a:srgbClr val="98626B"/>
+                  <a:srgbClr val="12151C"/>
+                </a:solidFill>
+                <a:latin typeface="맑은 고딕"/>
+                <a:ea typeface="맑은 고딕"/>
+              </a:rPr>
+              <a:t>묵묵한 성실로</a:t>
+            </a:r>
+          </a:p>
+          <a:p>
+            <a:pPr algn="l">
+              <a:lnSpc>
+                <a:spcPts val="1739"/>
+              </a:lnSpc>
+            </a:pPr>
+            <a:r>
+              <a:rPr sz="1200" b="1">
+                <a:solidFill>
+                  <a:srgbClr val="12151C"/>
+                </a:solidFill>
+                <a:latin typeface="맑은 고딕"/>
+                <a:ea typeface="맑은 고딕"/>
+              </a:rPr>
+              <a:t>보답하겠습니다</a:t>
+            </a:r>
+          </a:p>
+        </p:txBody>
+      </p:sp>
+      <p:sp>
+        <p:nvSpPr>
+          <p:cNvPr id="5" name="Rectangle 4"/>
+          <p:cNvSpPr/>
+          <p:nvPr/>
+        </p:nvSpPr>
+        <p:spPr>
+          <a:xfrm>
+            <a:off x="252000" y="1296000"/>
+            <a:ext cx="144000" cy="18000"/>
+          </a:xfrm>
+          <a:prstGeom prst="rect">
+            <a:avLst/>
+          </a:prstGeom>
+          <a:solidFill>
+            <a:srgbClr val="4CD964"/>
+          </a:solidFill>
+          <a:ln>
+            <a:noFill/>
+          </a:ln>
+        </p:spPr>
+        <p:txBody>
+          <a:bodyPr rtlCol="0" anchor="ctr"/>
+          <a:lstStyle/>
+          <a:p>
+            <a:pPr algn="ctr"/>
+          </a:p>
+        </p:txBody>
+      </p:sp>
+      <p:sp>
+        <p:nvSpPr>
+          <p:cNvPr id="6" name="텍스트"/>
+          <p:cNvSpPr txBox="1"/>
+          <p:nvPr/>
+        </p:nvSpPr>
+        <p:spPr>
+          <a:xfrm>
+            <a:off x="252000" y="1404000"/>
+            <a:ext cx="1656000" cy="133351"/>
+          </a:xfrm>
+          <a:prstGeom prst="rect">
+            <a:avLst/>
+          </a:prstGeom>
+          <a:noFill/>
+        </p:spPr>
+        <p:txBody>
+          <a:bodyPr wrap="square" lIns="0" rIns="0" tIns="0" bIns="0" anchor="t">
+            <a:spAutoFit/>
+          </a:bodyPr>
+          <a:lstStyle/>
+          <a:p>
+            <a:pPr algn="l">
+              <a:lnSpc>
+                <a:spcPts val="1015"/>
+              </a:lnSpc>
+            </a:pPr>
+            <a:r>
+              <a:rPr sz="700" b="1" spc="200">
+                <a:solidFill>
+                  <a:srgbClr val="6B7280"/>
                 </a:solidFill>
                 <a:latin typeface="맑은 고딕"/>
                 <a:ea typeface="맑은 고딕"/>
@@ -3769,104 +3729,6 @@
           </a:p>
         </p:txBody>
       </p:sp>
-      <p:sp>
-        <p:nvSpPr>
-          <p:cNvPr id="7" name="Freeform 6"/>
-          <p:cNvSpPr/>
-          <p:nvPr/>
-        </p:nvSpPr>
-        <p:spPr>
-          <a:xfrm>
-            <a:off x="1558800" y="241200"/>
-            <a:ext cx="122400" cy="162000"/>
-          </a:xfrm>
-          <a:custGeom>
-            <a:avLst/>
-            <a:gdLst/>
-            <a:ahLst/>
-            <a:cxnLst/>
-            <a:rect l="l" t="t" r="r" b="b"/>
-            <a:pathLst>
-              <a:path w="122400" h="162000">
-                <a:moveTo>
-                  <a:pt x="0" y="18000"/>
-                </a:moveTo>
-                <a:lnTo>
-                  <a:pt x="61200" y="0"/>
-                </a:lnTo>
-                <a:lnTo>
-                  <a:pt x="122400" y="18000"/>
-                </a:lnTo>
-                <a:lnTo>
-                  <a:pt x="122400" y="86400"/>
-                </a:lnTo>
-                <a:lnTo>
-                  <a:pt x="61200" y="162000"/>
-                </a:lnTo>
-                <a:lnTo>
-                  <a:pt x="0" y="86400"/>
-                </a:lnTo>
-                <a:close/>
-              </a:path>
-            </a:pathLst>
-          </a:custGeom>
-          <a:solidFill>
-            <a:srgbClr val="CC334D"/>
-          </a:solidFill>
-          <a:ln>
-            <a:noFill/>
-          </a:ln>
-        </p:spPr>
-        <p:txBody>
-          <a:bodyPr rtlCol="0" anchor="ctr"/>
-          <a:lstStyle/>
-          <a:p>
-            <a:pPr algn="ctr"/>
-          </a:p>
-        </p:txBody>
-      </p:sp>
-      <p:cxnSp>
-        <p:nvCxnSpPr>
-          <p:cNvPr id="8" name="Connector 7"/>
-          <p:cNvCxnSpPr/>
-          <p:nvPr/>
-        </p:nvCxnSpPr>
-        <p:spPr>
-          <a:xfrm>
-            <a:off x="1594800" y="324000"/>
-            <a:ext cx="19800" cy="21600"/>
-          </a:xfrm>
-          <a:prstGeom prst="line">
-            <a:avLst/>
-          </a:prstGeom>
-          <a:ln w="12600">
-            <a:solidFill>
-              <a:srgbClr val="F4CDD3"/>
-            </a:solidFill>
-          </a:ln>
-        </p:spPr>
-      </p:cxnSp>
-      <p:cxnSp>
-        <p:nvCxnSpPr>
-          <p:cNvPr id="9" name="Connector 8"/>
-          <p:cNvCxnSpPr/>
-          <p:nvPr/>
-        </p:nvCxnSpPr>
-        <p:spPr>
-          <a:xfrm flipV="1">
-            <a:off x="1614600" y="302400"/>
-            <a:ext cx="34200" cy="43200"/>
-          </a:xfrm>
-          <a:prstGeom prst="line">
-            <a:avLst/>
-          </a:prstGeom>
-          <a:ln w="12600">
-            <a:solidFill>
-              <a:srgbClr val="F4CDD3"/>
-            </a:solidFill>
-          </a:ln>
-        </p:spPr>
-      </p:cxnSp>
     </p:spTree>
   </p:cSld>
   <p:clrMapOvr>

--- a/public/fun/cards/public/public-25.pptx
+++ b/public/fun/cards/public/public-25.pptx
@@ -3099,56 +3099,45 @@
       <p:grpSpPr/>
       <p:sp>
         <p:nvSpPr>
-          <p:cNvPr id="2" name="텍스트"/>
-          <p:cNvSpPr txBox="1"/>
+          <p:cNvPr id="2" name="Rectangle 1"/>
+          <p:cNvSpPr/>
           <p:nvPr/>
         </p:nvSpPr>
         <p:spPr>
           <a:xfrm>
-            <a:off x="252000" y="223200"/>
-            <a:ext cx="2016000" cy="133351"/>
+            <a:off x="93600" y="93600"/>
+            <a:ext cx="3052800" cy="1612800"/>
           </a:xfrm>
           <a:prstGeom prst="rect">
             <a:avLst/>
           </a:prstGeom>
           <a:noFill/>
-        </p:spPr>
-        <p:txBody>
-          <a:bodyPr wrap="square" lIns="0" rIns="0" tIns="0" bIns="0" anchor="t">
-            <a:spAutoFit/>
-          </a:bodyPr>
-          <a:lstStyle/>
-          <a:p>
-            <a:pPr algn="l">
-              <a:lnSpc>
-                <a:spcPts val="1015"/>
-              </a:lnSpc>
-            </a:pPr>
-            <a:r>
-              <a:rPr sz="700" b="1" spc="200">
-                <a:solidFill>
-                  <a:srgbClr val="285F37"/>
-                </a:solidFill>
-                <a:latin typeface="맑은 고딕"/>
-                <a:ea typeface="맑은 고딕"/>
-              </a:rPr>
-              <a:t>기관명 · 부서명</a:t>
-            </a:r>
-          </a:p>
-        </p:txBody>
-      </p:sp>
-      <p:sp>
-        <p:nvSpPr>
-          <p:cNvPr id="3" name="Oval 2"/>
+          <a:ln w="3600">
+            <a:solidFill>
+              <a:srgbClr val="CDF4D4"/>
+            </a:solidFill>
+          </a:ln>
+        </p:spPr>
+        <p:txBody>
+          <a:bodyPr rtlCol="0" anchor="ctr"/>
+          <a:lstStyle/>
+          <a:p>
+            <a:pPr algn="ctr"/>
+          </a:p>
+        </p:txBody>
+      </p:sp>
+      <p:sp>
+        <p:nvSpPr>
+          <p:cNvPr id="3" name="Rectangle 2"/>
           <p:cNvSpPr/>
           <p:nvPr/>
         </p:nvSpPr>
         <p:spPr>
           <a:xfrm>
-            <a:off x="2955600" y="241200"/>
-            <a:ext cx="64800" cy="64800"/>
-          </a:xfrm>
-          <a:prstGeom prst="ellipse">
+            <a:off x="252000" y="252000"/>
+            <a:ext cx="79200" cy="79200"/>
+          </a:xfrm>
+          <a:prstGeom prst="rect">
             <a:avLst/>
           </a:prstGeom>
           <a:solidFill>
@@ -3174,8 +3163,8 @@
         </p:nvSpPr>
         <p:spPr>
           <a:xfrm>
-            <a:off x="252000" y="676800"/>
-            <a:ext cx="2520000" cy="360000"/>
+            <a:off x="396000" y="259200"/>
+            <a:ext cx="1512000" cy="123826"/>
           </a:xfrm>
           <a:prstGeom prst="rect">
             <a:avLst/>
@@ -3190,11 +3179,72 @@
           <a:p>
             <a:pPr algn="l">
               <a:lnSpc>
-                <a:spcPts val="3190"/>
+                <a:spcPts val="942"/>
               </a:lnSpc>
             </a:pPr>
             <a:r>
-              <a:rPr sz="2200" b="1">
+              <a:rPr sz="650" b="1" spc="220">
+                <a:solidFill>
+                  <a:srgbClr val="285F37"/>
+                </a:solidFill>
+                <a:latin typeface="맑은 고딕"/>
+                <a:ea typeface="맑은 고딕"/>
+              </a:rPr>
+              <a:t>기관명 · 부서명</a:t>
+            </a:r>
+          </a:p>
+        </p:txBody>
+      </p:sp>
+      <p:cxnSp>
+        <p:nvCxnSpPr>
+          <p:cNvPr id="5" name="Connector 4"/>
+          <p:cNvCxnSpPr/>
+          <p:nvPr/>
+        </p:nvCxnSpPr>
+        <p:spPr>
+          <a:xfrm>
+            <a:off x="252000" y="446400"/>
+            <a:ext cx="2736000" cy="0"/>
+          </a:xfrm>
+          <a:prstGeom prst="line">
+            <a:avLst/>
+          </a:prstGeom>
+          <a:ln w="3600">
+            <a:solidFill>
+              <a:srgbClr val="CDF4D4"/>
+            </a:solidFill>
+          </a:ln>
+        </p:spPr>
+      </p:cxnSp>
+      <p:sp>
+        <p:nvSpPr>
+          <p:cNvPr id="6" name="텍스트"/>
+          <p:cNvSpPr txBox="1"/>
+          <p:nvPr/>
+        </p:nvSpPr>
+        <p:spPr>
+          <a:xfrm>
+            <a:off x="252000" y="964800"/>
+            <a:ext cx="1800000" cy="237600"/>
+          </a:xfrm>
+          <a:prstGeom prst="rect">
+            <a:avLst/>
+          </a:prstGeom>
+          <a:noFill/>
+        </p:spPr>
+        <p:txBody>
+          <a:bodyPr wrap="square" lIns="0" rIns="0" tIns="0" bIns="0" anchor="t">
+            <a:spAutoFit/>
+          </a:bodyPr>
+          <a:lstStyle/>
+          <a:p>
+            <a:pPr algn="l">
+              <a:lnSpc>
+                <a:spcPts val="1957"/>
+              </a:lnSpc>
+            </a:pPr>
+            <a:r>
+              <a:rPr sz="1350" b="1" spc="120">
                 <a:solidFill>
                   <a:srgbClr val="12151C"/>
                 </a:solidFill>
@@ -3208,14 +3258,14 @@
       </p:sp>
       <p:sp>
         <p:nvSpPr>
-          <p:cNvPr id="5" name="텍스트"/>
+          <p:cNvPr id="7" name="텍스트"/>
           <p:cNvSpPr txBox="1"/>
           <p:nvPr/>
         </p:nvSpPr>
         <p:spPr>
           <a:xfrm>
-            <a:off x="252000" y="1080000"/>
-            <a:ext cx="2520000" cy="171451"/>
+            <a:off x="252000" y="1216800"/>
+            <a:ext cx="1800000" cy="133351"/>
           </a:xfrm>
           <a:prstGeom prst="rect">
             <a:avLst/>
@@ -3230,11 +3280,11 @@
           <a:p>
             <a:pPr algn="l">
               <a:lnSpc>
-                <a:spcPts val="1305"/>
+                <a:spcPts val="1015"/>
               </a:lnSpc>
             </a:pPr>
             <a:r>
-              <a:rPr sz="900" b="0">
+              <a:rPr sz="700" b="0" spc="60">
                 <a:solidFill>
                   <a:srgbClr val="285F37"/>
                 </a:solidFill>
@@ -3248,19 +3298,19 @@
       </p:sp>
       <p:cxnSp>
         <p:nvCxnSpPr>
-          <p:cNvPr id="6" name="Connector 5"/>
+          <p:cNvPr id="8" name="Connector 7"/>
           <p:cNvCxnSpPr/>
           <p:nvPr/>
         </p:nvCxnSpPr>
         <p:spPr>
           <a:xfrm>
-            <a:off x="252000" y="1339200"/>
-            <a:ext cx="2736000" cy="0"/>
+            <a:off x="1872000" y="943200"/>
+            <a:ext cx="0" cy="604800"/>
           </a:xfrm>
           <a:prstGeom prst="line">
             <a:avLst/>
           </a:prstGeom>
-          <a:ln w="5760">
+          <a:ln w="3600">
             <a:solidFill>
               <a:srgbClr val="CDF4D4"/>
             </a:solidFill>
@@ -3269,14 +3319,14 @@
       </p:cxnSp>
       <p:sp>
         <p:nvSpPr>
-          <p:cNvPr id="7" name="텍스트"/>
+          <p:cNvPr id="9" name="텍스트"/>
           <p:cNvSpPr txBox="1"/>
           <p:nvPr/>
         </p:nvSpPr>
         <p:spPr>
           <a:xfrm>
-            <a:off x="252000" y="1411200"/>
-            <a:ext cx="792000" cy="129541"/>
+            <a:off x="2016000" y="1033200"/>
+            <a:ext cx="302400" cy="91441"/>
           </a:xfrm>
           <a:prstGeom prst="rect">
             <a:avLst/>
@@ -3291,11 +3341,51 @@
           <a:p>
             <a:pPr algn="l">
               <a:lnSpc>
-                <a:spcPts val="986"/>
+                <a:spcPts val="696"/>
               </a:lnSpc>
             </a:pPr>
             <a:r>
-              <a:rPr sz="680" b="0">
+              <a:rPr sz="480" b="1" spc="140">
+                <a:solidFill>
+                  <a:srgbClr val="285F37"/>
+                </a:solidFill>
+                <a:latin typeface="맑은 고딕"/>
+                <a:ea typeface="맑은 고딕"/>
+              </a:rPr>
+              <a:t>TEL</a:t>
+            </a:r>
+          </a:p>
+        </p:txBody>
+      </p:sp>
+      <p:sp>
+        <p:nvSpPr>
+          <p:cNvPr id="10" name="텍스트"/>
+          <p:cNvSpPr txBox="1"/>
+          <p:nvPr/>
+        </p:nvSpPr>
+        <p:spPr>
+          <a:xfrm>
+            <a:off x="2318400" y="1022400"/>
+            <a:ext cx="972000" cy="123826"/>
+          </a:xfrm>
+          <a:prstGeom prst="rect">
+            <a:avLst/>
+          </a:prstGeom>
+          <a:noFill/>
+        </p:spPr>
+        <p:txBody>
+          <a:bodyPr wrap="square" lIns="0" rIns="0" tIns="0" bIns="0" anchor="t">
+            <a:spAutoFit/>
+          </a:bodyPr>
+          <a:lstStyle/>
+          <a:p>
+            <a:pPr algn="l">
+              <a:lnSpc>
+                <a:spcPts val="942"/>
+              </a:lnSpc>
+            </a:pPr>
+            <a:r>
+              <a:rPr sz="650" b="0">
                 <a:solidFill>
                   <a:srgbClr val="12151C"/>
                 </a:solidFill>
@@ -3309,14 +3399,14 @@
       </p:sp>
       <p:sp>
         <p:nvSpPr>
-          <p:cNvPr id="8" name="텍스트"/>
+          <p:cNvPr id="11" name="텍스트"/>
           <p:cNvSpPr txBox="1"/>
           <p:nvPr/>
         </p:nvSpPr>
         <p:spPr>
           <a:xfrm>
-            <a:off x="1080000" y="1411200"/>
-            <a:ext cx="900000" cy="129541"/>
+            <a:off x="2016000" y="1177200"/>
+            <a:ext cx="302400" cy="91441"/>
           </a:xfrm>
           <a:prstGeom prst="rect">
             <a:avLst/>
@@ -3331,11 +3421,51 @@
           <a:p>
             <a:pPr algn="l">
               <a:lnSpc>
-                <a:spcPts val="986"/>
+                <a:spcPts val="696"/>
               </a:lnSpc>
             </a:pPr>
             <a:r>
-              <a:rPr sz="680" b="0">
+              <a:rPr sz="480" b="1" spc="140">
+                <a:solidFill>
+                  <a:srgbClr val="285F37"/>
+                </a:solidFill>
+                <a:latin typeface="맑은 고딕"/>
+                <a:ea typeface="맑은 고딕"/>
+              </a:rPr>
+              <a:t>MAIL</a:t>
+            </a:r>
+          </a:p>
+        </p:txBody>
+      </p:sp>
+      <p:sp>
+        <p:nvSpPr>
+          <p:cNvPr id="12" name="텍스트"/>
+          <p:cNvSpPr txBox="1"/>
+          <p:nvPr/>
+        </p:nvSpPr>
+        <p:spPr>
+          <a:xfrm>
+            <a:off x="2318400" y="1166400"/>
+            <a:ext cx="972000" cy="123826"/>
+          </a:xfrm>
+          <a:prstGeom prst="rect">
+            <a:avLst/>
+          </a:prstGeom>
+          <a:noFill/>
+        </p:spPr>
+        <p:txBody>
+          <a:bodyPr wrap="square" lIns="0" rIns="0" tIns="0" bIns="0" anchor="t">
+            <a:spAutoFit/>
+          </a:bodyPr>
+          <a:lstStyle/>
+          <a:p>
+            <a:pPr algn="l">
+              <a:lnSpc>
+                <a:spcPts val="942"/>
+              </a:lnSpc>
+            </a:pPr>
+            <a:r>
+              <a:rPr sz="650" b="0">
                 <a:solidFill>
                   <a:srgbClr val="12151C"/>
                 </a:solidFill>
@@ -3349,14 +3479,14 @@
       </p:sp>
       <p:sp>
         <p:nvSpPr>
-          <p:cNvPr id="9" name="텍스트"/>
+          <p:cNvPr id="13" name="텍스트"/>
           <p:cNvSpPr txBox="1"/>
           <p:nvPr/>
         </p:nvSpPr>
         <p:spPr>
           <a:xfrm>
-            <a:off x="2052000" y="1411200"/>
-            <a:ext cx="972000" cy="129541"/>
+            <a:off x="2016000" y="1321200"/>
+            <a:ext cx="302400" cy="91441"/>
           </a:xfrm>
           <a:prstGeom prst="rect">
             <a:avLst/>
@@ -3371,11 +3501,51 @@
           <a:p>
             <a:pPr algn="l">
               <a:lnSpc>
-                <a:spcPts val="986"/>
+                <a:spcPts val="696"/>
               </a:lnSpc>
             </a:pPr>
             <a:r>
-              <a:rPr sz="680" b="0">
+              <a:rPr sz="480" b="1" spc="140">
+                <a:solidFill>
+                  <a:srgbClr val="285F37"/>
+                </a:solidFill>
+                <a:latin typeface="맑은 고딕"/>
+                <a:ea typeface="맑은 고딕"/>
+              </a:rPr>
+              <a:t>ADDR</a:t>
+            </a:r>
+          </a:p>
+        </p:txBody>
+      </p:sp>
+      <p:sp>
+        <p:nvSpPr>
+          <p:cNvPr id="14" name="텍스트"/>
+          <p:cNvSpPr txBox="1"/>
+          <p:nvPr/>
+        </p:nvSpPr>
+        <p:spPr>
+          <a:xfrm>
+            <a:off x="2318400" y="1310400"/>
+            <a:ext cx="972000" cy="123826"/>
+          </a:xfrm>
+          <a:prstGeom prst="rect">
+            <a:avLst/>
+          </a:prstGeom>
+          <a:noFill/>
+        </p:spPr>
+        <p:txBody>
+          <a:bodyPr wrap="square" lIns="0" rIns="0" tIns="0" bIns="0" anchor="t">
+            <a:spAutoFit/>
+          </a:bodyPr>
+          <a:lstStyle/>
+          <a:p>
+            <a:pPr algn="l">
+              <a:lnSpc>
+                <a:spcPts val="942"/>
+              </a:lnSpc>
+            </a:pPr>
+            <a:r>
+              <a:rPr sz="650" b="0">
                 <a:solidFill>
                   <a:srgbClr val="12151C"/>
                 </a:solidFill>
@@ -3383,126 +3553,6 @@
                 <a:ea typeface="맑은 고딕"/>
               </a:rPr>
               <a:t>주소를 입력해 주세요</a:t>
-            </a:r>
-          </a:p>
-        </p:txBody>
-      </p:sp>
-      <p:sp>
-        <p:nvSpPr>
-          <p:cNvPr id="10" name="텍스트"/>
-          <p:cNvSpPr txBox="1"/>
-          <p:nvPr/>
-        </p:nvSpPr>
-        <p:spPr>
-          <a:xfrm>
-            <a:off x="252000" y="1526400"/>
-            <a:ext cx="216000" cy="95251"/>
-          </a:xfrm>
-          <a:prstGeom prst="rect">
-            <a:avLst/>
-          </a:prstGeom>
-          <a:noFill/>
-        </p:spPr>
-        <p:txBody>
-          <a:bodyPr wrap="square" lIns="0" rIns="0" tIns="0" bIns="0" anchor="t">
-            <a:spAutoFit/>
-          </a:bodyPr>
-          <a:lstStyle/>
-          <a:p>
-            <a:pPr algn="l">
-              <a:lnSpc>
-                <a:spcPts val="725"/>
-              </a:lnSpc>
-            </a:pPr>
-            <a:r>
-              <a:rPr sz="500" b="1" spc="120">
-                <a:solidFill>
-                  <a:srgbClr val="285F37"/>
-                </a:solidFill>
-                <a:latin typeface="맑은 고딕"/>
-                <a:ea typeface="맑은 고딕"/>
-              </a:rPr>
-              <a:t>TEL</a:t>
-            </a:r>
-          </a:p>
-        </p:txBody>
-      </p:sp>
-      <p:sp>
-        <p:nvSpPr>
-          <p:cNvPr id="11" name="텍스트"/>
-          <p:cNvSpPr txBox="1"/>
-          <p:nvPr/>
-        </p:nvSpPr>
-        <p:spPr>
-          <a:xfrm>
-            <a:off x="1080000" y="1526400"/>
-            <a:ext cx="216000" cy="95251"/>
-          </a:xfrm>
-          <a:prstGeom prst="rect">
-            <a:avLst/>
-          </a:prstGeom>
-          <a:noFill/>
-        </p:spPr>
-        <p:txBody>
-          <a:bodyPr wrap="square" lIns="0" rIns="0" tIns="0" bIns="0" anchor="t">
-            <a:spAutoFit/>
-          </a:bodyPr>
-          <a:lstStyle/>
-          <a:p>
-            <a:pPr algn="l">
-              <a:lnSpc>
-                <a:spcPts val="725"/>
-              </a:lnSpc>
-            </a:pPr>
-            <a:r>
-              <a:rPr sz="500" b="1" spc="120">
-                <a:solidFill>
-                  <a:srgbClr val="285F37"/>
-                </a:solidFill>
-                <a:latin typeface="맑은 고딕"/>
-                <a:ea typeface="맑은 고딕"/>
-              </a:rPr>
-              <a:t>MAIL</a:t>
-            </a:r>
-          </a:p>
-        </p:txBody>
-      </p:sp>
-      <p:sp>
-        <p:nvSpPr>
-          <p:cNvPr id="12" name="텍스트"/>
-          <p:cNvSpPr txBox="1"/>
-          <p:nvPr/>
-        </p:nvSpPr>
-        <p:spPr>
-          <a:xfrm>
-            <a:off x="2052000" y="1526400"/>
-            <a:ext cx="216000" cy="95251"/>
-          </a:xfrm>
-          <a:prstGeom prst="rect">
-            <a:avLst/>
-          </a:prstGeom>
-          <a:noFill/>
-        </p:spPr>
-        <p:txBody>
-          <a:bodyPr wrap="square" lIns="0" rIns="0" tIns="0" bIns="0" anchor="t">
-            <a:spAutoFit/>
-          </a:bodyPr>
-          <a:lstStyle/>
-          <a:p>
-            <a:pPr algn="l">
-              <a:lnSpc>
-                <a:spcPts val="725"/>
-              </a:lnSpc>
-            </a:pPr>
-            <a:r>
-              <a:rPr sz="500" b="1" spc="120">
-                <a:solidFill>
-                  <a:srgbClr val="285F37"/>
-                </a:solidFill>
-                <a:latin typeface="맑은 고딕"/>
-                <a:ea typeface="맑은 고딕"/>
-              </a:rPr>
-              <a:t>ADDR</a:t>
             </a:r>
           </a:p>
         </p:txBody>
@@ -3533,22 +3583,548 @@
         <p:nvPr/>
       </p:nvGrpSpPr>
       <p:grpSpPr/>
-      <p:sp>
-        <p:nvSpPr>
-          <p:cNvPr id="2" name="Rectangle 1"/>
-          <p:cNvSpPr/>
+      <p:cxnSp>
+        <p:nvCxnSpPr>
+          <p:cNvPr id="2" name="Connector 1"/>
+          <p:cNvCxnSpPr/>
           <p:nvPr/>
-        </p:nvSpPr>
-        <p:spPr>
-          <a:xfrm>
-            <a:off x="2304000" y="504000"/>
-            <a:ext cx="684000" cy="684000"/>
+        </p:nvCxnSpPr>
+        <p:spPr>
+          <a:xfrm>
+            <a:off x="396000" y="360000"/>
+            <a:ext cx="0" cy="648000"/>
+          </a:xfrm>
+          <a:prstGeom prst="line">
+            <a:avLst/>
+          </a:prstGeom>
+          <a:ln w="5760">
+            <a:solidFill>
+              <a:srgbClr val="4CD964"/>
+            </a:solidFill>
+          </a:ln>
+        </p:spPr>
+      </p:cxnSp>
+      <p:sp>
+        <p:nvSpPr>
+          <p:cNvPr id="3" name="텍스트"/>
+          <p:cNvSpPr txBox="1"/>
+          <p:nvPr/>
+        </p:nvSpPr>
+        <p:spPr>
+          <a:xfrm>
+            <a:off x="252000" y="187200"/>
+            <a:ext cx="1440000" cy="99061"/>
           </a:xfrm>
           <a:prstGeom prst="rect">
             <a:avLst/>
           </a:prstGeom>
           <a:noFill/>
-          <a:ln w="7200">
+        </p:spPr>
+        <p:txBody>
+          <a:bodyPr wrap="square" lIns="0" rIns="0" tIns="0" bIns="0" anchor="t">
+            <a:spAutoFit/>
+          </a:bodyPr>
+          <a:lstStyle/>
+          <a:p>
+            <a:pPr algn="l">
+              <a:lnSpc>
+                <a:spcPts val="754"/>
+              </a:lnSpc>
+            </a:pPr>
+            <a:r>
+              <a:rPr sz="520" b="1" spc="240">
+                <a:solidFill>
+                  <a:srgbClr val="6B7280"/>
+                </a:solidFill>
+                <a:latin typeface="맑은 고딕"/>
+                <a:ea typeface="맑은 고딕"/>
+              </a:rPr>
+              <a:t>담당 업무</a:t>
+            </a:r>
+          </a:p>
+        </p:txBody>
+      </p:sp>
+      <p:sp>
+        <p:nvSpPr>
+          <p:cNvPr id="4" name="Oval 3"/>
+          <p:cNvSpPr/>
+          <p:nvPr/>
+        </p:nvSpPr>
+        <p:spPr>
+          <a:xfrm>
+            <a:off x="367200" y="374400"/>
+            <a:ext cx="57600" cy="57600"/>
+          </a:xfrm>
+          <a:prstGeom prst="ellipse">
+            <a:avLst/>
+          </a:prstGeom>
+          <a:solidFill>
+            <a:srgbClr val="4CD964"/>
+          </a:solidFill>
+          <a:ln w="5760">
+            <a:solidFill>
+              <a:srgbClr val="4CD964"/>
+            </a:solidFill>
+          </a:ln>
+        </p:spPr>
+        <p:txBody>
+          <a:bodyPr rtlCol="0" anchor="ctr"/>
+          <a:lstStyle/>
+          <a:p>
+            <a:pPr algn="ctr"/>
+          </a:p>
+        </p:txBody>
+      </p:sp>
+      <p:sp>
+        <p:nvSpPr>
+          <p:cNvPr id="5" name="텍스트"/>
+          <p:cNvSpPr txBox="1"/>
+          <p:nvPr/>
+        </p:nvSpPr>
+        <p:spPr>
+          <a:xfrm>
+            <a:off x="540000" y="331200"/>
+            <a:ext cx="1512000" cy="158400"/>
+          </a:xfrm>
+          <a:prstGeom prst="rect">
+            <a:avLst/>
+          </a:prstGeom>
+          <a:noFill/>
+        </p:spPr>
+        <p:txBody>
+          <a:bodyPr wrap="square" lIns="0" rIns="0" tIns="0" bIns="0" anchor="t">
+            <a:spAutoFit/>
+          </a:bodyPr>
+          <a:lstStyle/>
+          <a:p>
+            <a:pPr algn="l">
+              <a:lnSpc>
+                <a:spcPts val="1073"/>
+              </a:lnSpc>
+            </a:pPr>
+            <a:r>
+              <a:rPr sz="740" b="1">
+                <a:solidFill>
+                  <a:srgbClr val="12151C"/>
+                </a:solidFill>
+                <a:latin typeface="맑은 고딕"/>
+                <a:ea typeface="맑은 고딕"/>
+              </a:rPr>
+              <a:t>행정 지원</a:t>
+            </a:r>
+          </a:p>
+        </p:txBody>
+      </p:sp>
+      <p:sp>
+        <p:nvSpPr>
+          <p:cNvPr id="6" name="Oval 5"/>
+          <p:cNvSpPr/>
+          <p:nvPr/>
+        </p:nvSpPr>
+        <p:spPr>
+          <a:xfrm>
+            <a:off x="367200" y="597600"/>
+            <a:ext cx="57600" cy="57600"/>
+          </a:xfrm>
+          <a:prstGeom prst="ellipse">
+            <a:avLst/>
+          </a:prstGeom>
+          <a:solidFill>
+            <a:srgbClr val="F3F4F6"/>
+          </a:solidFill>
+          <a:ln w="5760">
+            <a:solidFill>
+              <a:srgbClr val="4CD964"/>
+            </a:solidFill>
+          </a:ln>
+        </p:spPr>
+        <p:txBody>
+          <a:bodyPr rtlCol="0" anchor="ctr"/>
+          <a:lstStyle/>
+          <a:p>
+            <a:pPr algn="ctr"/>
+          </a:p>
+        </p:txBody>
+      </p:sp>
+      <p:sp>
+        <p:nvSpPr>
+          <p:cNvPr id="7" name="텍스트"/>
+          <p:cNvSpPr txBox="1"/>
+          <p:nvPr/>
+        </p:nvSpPr>
+        <p:spPr>
+          <a:xfrm>
+            <a:off x="540000" y="554400"/>
+            <a:ext cx="1512000" cy="158400"/>
+          </a:xfrm>
+          <a:prstGeom prst="rect">
+            <a:avLst/>
+          </a:prstGeom>
+          <a:noFill/>
+        </p:spPr>
+        <p:txBody>
+          <a:bodyPr wrap="square" lIns="0" rIns="0" tIns="0" bIns="0" anchor="t">
+            <a:spAutoFit/>
+          </a:bodyPr>
+          <a:lstStyle/>
+          <a:p>
+            <a:pPr algn="l">
+              <a:lnSpc>
+                <a:spcPts val="1073"/>
+              </a:lnSpc>
+            </a:pPr>
+            <a:r>
+              <a:rPr sz="740" b="1">
+                <a:solidFill>
+                  <a:srgbClr val="12151C"/>
+                </a:solidFill>
+                <a:latin typeface="맑은 고딕"/>
+                <a:ea typeface="맑은 고딕"/>
+              </a:rPr>
+              <a:t>주민 서비스</a:t>
+            </a:r>
+          </a:p>
+        </p:txBody>
+      </p:sp>
+      <p:sp>
+        <p:nvSpPr>
+          <p:cNvPr id="8" name="Oval 7"/>
+          <p:cNvSpPr/>
+          <p:nvPr/>
+        </p:nvSpPr>
+        <p:spPr>
+          <a:xfrm>
+            <a:off x="367200" y="820800"/>
+            <a:ext cx="57600" cy="57600"/>
+          </a:xfrm>
+          <a:prstGeom prst="ellipse">
+            <a:avLst/>
+          </a:prstGeom>
+          <a:solidFill>
+            <a:srgbClr val="F3F4F6"/>
+          </a:solidFill>
+          <a:ln w="5760">
+            <a:solidFill>
+              <a:srgbClr val="4CD964"/>
+            </a:solidFill>
+          </a:ln>
+        </p:spPr>
+        <p:txBody>
+          <a:bodyPr rtlCol="0" anchor="ctr"/>
+          <a:lstStyle/>
+          <a:p>
+            <a:pPr algn="ctr"/>
+          </a:p>
+        </p:txBody>
+      </p:sp>
+      <p:sp>
+        <p:nvSpPr>
+          <p:cNvPr id="9" name="텍스트"/>
+          <p:cNvSpPr txBox="1"/>
+          <p:nvPr/>
+        </p:nvSpPr>
+        <p:spPr>
+          <a:xfrm>
+            <a:off x="540000" y="777600"/>
+            <a:ext cx="1512000" cy="158400"/>
+          </a:xfrm>
+          <a:prstGeom prst="rect">
+            <a:avLst/>
+          </a:prstGeom>
+          <a:noFill/>
+        </p:spPr>
+        <p:txBody>
+          <a:bodyPr wrap="square" lIns="0" rIns="0" tIns="0" bIns="0" anchor="t">
+            <a:spAutoFit/>
+          </a:bodyPr>
+          <a:lstStyle/>
+          <a:p>
+            <a:pPr algn="l">
+              <a:lnSpc>
+                <a:spcPts val="1073"/>
+              </a:lnSpc>
+            </a:pPr>
+            <a:r>
+              <a:rPr sz="740" b="1">
+                <a:solidFill>
+                  <a:srgbClr val="12151C"/>
+                </a:solidFill>
+                <a:latin typeface="맑은 고딕"/>
+                <a:ea typeface="맑은 고딕"/>
+              </a:rPr>
+              <a:t>안전 관리</a:t>
+            </a:r>
+          </a:p>
+        </p:txBody>
+      </p:sp>
+      <p:sp>
+        <p:nvSpPr>
+          <p:cNvPr id="10" name="Oval 9"/>
+          <p:cNvSpPr/>
+          <p:nvPr/>
+        </p:nvSpPr>
+        <p:spPr>
+          <a:xfrm>
+            <a:off x="367200" y="1044000"/>
+            <a:ext cx="57600" cy="57600"/>
+          </a:xfrm>
+          <a:prstGeom prst="ellipse">
+            <a:avLst/>
+          </a:prstGeom>
+          <a:solidFill>
+            <a:srgbClr val="F3F4F6"/>
+          </a:solidFill>
+          <a:ln w="5760">
+            <a:solidFill>
+              <a:srgbClr val="4CD964"/>
+            </a:solidFill>
+          </a:ln>
+        </p:spPr>
+        <p:txBody>
+          <a:bodyPr rtlCol="0" anchor="ctr"/>
+          <a:lstStyle/>
+          <a:p>
+            <a:pPr algn="ctr"/>
+          </a:p>
+        </p:txBody>
+      </p:sp>
+      <p:sp>
+        <p:nvSpPr>
+          <p:cNvPr id="11" name="텍스트"/>
+          <p:cNvSpPr txBox="1"/>
+          <p:nvPr/>
+        </p:nvSpPr>
+        <p:spPr>
+          <a:xfrm>
+            <a:off x="540000" y="1000800"/>
+            <a:ext cx="1512000" cy="158400"/>
+          </a:xfrm>
+          <a:prstGeom prst="rect">
+            <a:avLst/>
+          </a:prstGeom>
+          <a:noFill/>
+        </p:spPr>
+        <p:txBody>
+          <a:bodyPr wrap="square" lIns="0" rIns="0" tIns="0" bIns="0" anchor="t">
+            <a:spAutoFit/>
+          </a:bodyPr>
+          <a:lstStyle/>
+          <a:p>
+            <a:pPr algn="l">
+              <a:lnSpc>
+                <a:spcPts val="1073"/>
+              </a:lnSpc>
+            </a:pPr>
+            <a:r>
+              <a:rPr sz="740" b="1">
+                <a:solidFill>
+                  <a:srgbClr val="12151C"/>
+                </a:solidFill>
+                <a:latin typeface="맑은 고딕"/>
+                <a:ea typeface="맑은 고딕"/>
+              </a:rPr>
+              <a:t>환경 관리</a:t>
+            </a:r>
+          </a:p>
+        </p:txBody>
+      </p:sp>
+      <p:cxnSp>
+        <p:nvCxnSpPr>
+          <p:cNvPr id="12" name="Connector 11"/>
+          <p:cNvCxnSpPr/>
+          <p:nvPr/>
+        </p:nvCxnSpPr>
+        <p:spPr>
+          <a:xfrm>
+            <a:off x="2232000" y="345600"/>
+            <a:ext cx="0" cy="1166400"/>
+          </a:xfrm>
+          <a:prstGeom prst="line">
+            <a:avLst/>
+          </a:prstGeom>
+          <a:ln w="3600">
+            <a:solidFill>
+              <a:srgbClr val="DCDFE4"/>
+            </a:solidFill>
+          </a:ln>
+        </p:spPr>
+      </p:cxnSp>
+      <p:sp>
+        <p:nvSpPr>
+          <p:cNvPr id="13" name="텍스트"/>
+          <p:cNvSpPr txBox="1"/>
+          <p:nvPr/>
+        </p:nvSpPr>
+        <p:spPr>
+          <a:xfrm>
+            <a:off x="2376000" y="396000"/>
+            <a:ext cx="648000" cy="91441"/>
+          </a:xfrm>
+          <a:prstGeom prst="rect">
+            <a:avLst/>
+          </a:prstGeom>
+          <a:noFill/>
+        </p:spPr>
+        <p:txBody>
+          <a:bodyPr wrap="square" lIns="0" rIns="0" tIns="0" bIns="0" anchor="t">
+            <a:spAutoFit/>
+          </a:bodyPr>
+          <a:lstStyle/>
+          <a:p>
+            <a:pPr algn="l">
+              <a:lnSpc>
+                <a:spcPts val="696"/>
+              </a:lnSpc>
+            </a:pPr>
+            <a:r>
+              <a:rPr sz="480" b="1" spc="140">
+                <a:solidFill>
+                  <a:srgbClr val="6B7280"/>
+                </a:solidFill>
+                <a:latin typeface="맑은 고딕"/>
+                <a:ea typeface="맑은 고딕"/>
+              </a:rPr>
+              <a:t>HOURS</a:t>
+            </a:r>
+          </a:p>
+        </p:txBody>
+      </p:sp>
+      <p:sp>
+        <p:nvSpPr>
+          <p:cNvPr id="14" name="텍스트"/>
+          <p:cNvSpPr txBox="1"/>
+          <p:nvPr/>
+        </p:nvSpPr>
+        <p:spPr>
+          <a:xfrm>
+            <a:off x="2376000" y="511200"/>
+            <a:ext cx="720000" cy="118111"/>
+          </a:xfrm>
+          <a:prstGeom prst="rect">
+            <a:avLst/>
+          </a:prstGeom>
+          <a:noFill/>
+        </p:spPr>
+        <p:txBody>
+          <a:bodyPr wrap="square" lIns="0" rIns="0" tIns="0" bIns="0" anchor="t">
+            <a:spAutoFit/>
+          </a:bodyPr>
+          <a:lstStyle/>
+          <a:p>
+            <a:pPr algn="l">
+              <a:lnSpc>
+                <a:spcPts val="899"/>
+              </a:lnSpc>
+            </a:pPr>
+            <a:r>
+              <a:rPr sz="620" b="0">
+                <a:solidFill>
+                  <a:srgbClr val="12151C"/>
+                </a:solidFill>
+                <a:latin typeface="맑은 고딕"/>
+                <a:ea typeface="맑은 고딕"/>
+              </a:rPr>
+              <a:t>평일 09:00 – 18:00</a:t>
+            </a:r>
+          </a:p>
+        </p:txBody>
+      </p:sp>
+      <p:sp>
+        <p:nvSpPr>
+          <p:cNvPr id="15" name="텍스트"/>
+          <p:cNvSpPr txBox="1"/>
+          <p:nvPr/>
+        </p:nvSpPr>
+        <p:spPr>
+          <a:xfrm>
+            <a:off x="2376000" y="835200"/>
+            <a:ext cx="648000" cy="91441"/>
+          </a:xfrm>
+          <a:prstGeom prst="rect">
+            <a:avLst/>
+          </a:prstGeom>
+          <a:noFill/>
+        </p:spPr>
+        <p:txBody>
+          <a:bodyPr wrap="square" lIns="0" rIns="0" tIns="0" bIns="0" anchor="t">
+            <a:spAutoFit/>
+          </a:bodyPr>
+          <a:lstStyle/>
+          <a:p>
+            <a:pPr algn="l">
+              <a:lnSpc>
+                <a:spcPts val="696"/>
+              </a:lnSpc>
+            </a:pPr>
+            <a:r>
+              <a:rPr sz="480" b="1" spc="140">
+                <a:solidFill>
+                  <a:srgbClr val="6B7280"/>
+                </a:solidFill>
+                <a:latin typeface="맑은 고딕"/>
+                <a:ea typeface="맑은 고딕"/>
+              </a:rPr>
+              <a:t>INSTAGRAM</a:t>
+            </a:r>
+          </a:p>
+        </p:txBody>
+      </p:sp>
+      <p:sp>
+        <p:nvSpPr>
+          <p:cNvPr id="16" name="텍스트"/>
+          <p:cNvSpPr txBox="1"/>
+          <p:nvPr/>
+        </p:nvSpPr>
+        <p:spPr>
+          <a:xfrm>
+            <a:off x="2376000" y="950400"/>
+            <a:ext cx="684000" cy="118111"/>
+          </a:xfrm>
+          <a:prstGeom prst="rect">
+            <a:avLst/>
+          </a:prstGeom>
+          <a:noFill/>
+        </p:spPr>
+        <p:txBody>
+          <a:bodyPr wrap="square" lIns="0" rIns="0" tIns="0" bIns="0" anchor="t">
+            <a:spAutoFit/>
+          </a:bodyPr>
+          <a:lstStyle/>
+          <a:p>
+            <a:pPr algn="l">
+              <a:lnSpc>
+                <a:spcPts val="899"/>
+              </a:lnSpc>
+            </a:pPr>
+            <a:r>
+              <a:rPr sz="620" b="0">
+                <a:solidFill>
+                  <a:srgbClr val="12151C"/>
+                </a:solidFill>
+                <a:latin typeface="맑은 고딕"/>
+                <a:ea typeface="맑은 고딕"/>
+              </a:rPr>
+              <a:t>@아이디</a:t>
+            </a:r>
+          </a:p>
+        </p:txBody>
+      </p:sp>
+      <p:sp>
+        <p:nvSpPr>
+          <p:cNvPr id="17" name="Rectangle 16"/>
+          <p:cNvSpPr/>
+          <p:nvPr/>
+        </p:nvSpPr>
+        <p:spPr>
+          <a:xfrm>
+            <a:off x="2376000" y="1224000"/>
+            <a:ext cx="237600" cy="237600"/>
+          </a:xfrm>
+          <a:prstGeom prst="rect">
+            <a:avLst/>
+          </a:prstGeom>
+          <a:noFill/>
+          <a:ln w="4320">
             <a:solidFill>
               <a:srgbClr val="6B7280"/>
             </a:solidFill>
@@ -3565,14 +4141,14 @@
       </p:sp>
       <p:sp>
         <p:nvSpPr>
-          <p:cNvPr id="3" name="텍스트"/>
+          <p:cNvPr id="18" name="텍스트"/>
           <p:cNvSpPr txBox="1"/>
           <p:nvPr/>
         </p:nvSpPr>
         <p:spPr>
           <a:xfrm>
-            <a:off x="2304000" y="504000"/>
-            <a:ext cx="684000" cy="684000"/>
+            <a:off x="2376000" y="1224000"/>
+            <a:ext cx="237600" cy="237600"/>
           </a:xfrm>
           <a:prstGeom prst="rect">
             <a:avLst/>
@@ -3587,11 +4163,11 @@
           <a:p>
             <a:pPr algn="ctr">
               <a:lnSpc>
-                <a:spcPts val="1595"/>
+                <a:spcPts val="725"/>
               </a:lnSpc>
             </a:pPr>
             <a:r>
-              <a:rPr sz="1100" b="1">
+              <a:rPr sz="500" b="1">
                 <a:solidFill>
                   <a:srgbClr val="6B7280"/>
                 </a:solidFill>
@@ -3599,132 +4175,6 @@
                 <a:ea typeface="맑은 고딕"/>
               </a:rPr>
               <a:t>QR</a:t>
-            </a:r>
-          </a:p>
-        </p:txBody>
-      </p:sp>
-      <p:sp>
-        <p:nvSpPr>
-          <p:cNvPr id="4" name="텍스트"/>
-          <p:cNvSpPr txBox="1"/>
-          <p:nvPr/>
-        </p:nvSpPr>
-        <p:spPr>
-          <a:xfrm>
-            <a:off x="252000" y="504000"/>
-            <a:ext cx="1728000" cy="720000"/>
-          </a:xfrm>
-          <a:prstGeom prst="rect">
-            <a:avLst/>
-          </a:prstGeom>
-          <a:noFill/>
-        </p:spPr>
-        <p:txBody>
-          <a:bodyPr wrap="square" lIns="0" rIns="0" tIns="0" bIns="0" anchor="t">
-            <a:spAutoFit/>
-          </a:bodyPr>
-          <a:lstStyle/>
-          <a:p>
-            <a:pPr algn="l">
-              <a:lnSpc>
-                <a:spcPts val="1739"/>
-              </a:lnSpc>
-            </a:pPr>
-            <a:r>
-              <a:rPr sz="1200" b="1">
-                <a:solidFill>
-                  <a:srgbClr val="12151C"/>
-                </a:solidFill>
-                <a:latin typeface="맑은 고딕"/>
-                <a:ea typeface="맑은 고딕"/>
-              </a:rPr>
-              <a:t>묵묵한 성실로</a:t>
-            </a:r>
-          </a:p>
-          <a:p>
-            <a:pPr algn="l">
-              <a:lnSpc>
-                <a:spcPts val="1739"/>
-              </a:lnSpc>
-            </a:pPr>
-            <a:r>
-              <a:rPr sz="1200" b="1">
-                <a:solidFill>
-                  <a:srgbClr val="12151C"/>
-                </a:solidFill>
-                <a:latin typeface="맑은 고딕"/>
-                <a:ea typeface="맑은 고딕"/>
-              </a:rPr>
-              <a:t>보답하겠습니다</a:t>
-            </a:r>
-          </a:p>
-        </p:txBody>
-      </p:sp>
-      <p:sp>
-        <p:nvSpPr>
-          <p:cNvPr id="5" name="Rectangle 4"/>
-          <p:cNvSpPr/>
-          <p:nvPr/>
-        </p:nvSpPr>
-        <p:spPr>
-          <a:xfrm>
-            <a:off x="252000" y="1296000"/>
-            <a:ext cx="144000" cy="18000"/>
-          </a:xfrm>
-          <a:prstGeom prst="rect">
-            <a:avLst/>
-          </a:prstGeom>
-          <a:solidFill>
-            <a:srgbClr val="4CD964"/>
-          </a:solidFill>
-          <a:ln>
-            <a:noFill/>
-          </a:ln>
-        </p:spPr>
-        <p:txBody>
-          <a:bodyPr rtlCol="0" anchor="ctr"/>
-          <a:lstStyle/>
-          <a:p>
-            <a:pPr algn="ctr"/>
-          </a:p>
-        </p:txBody>
-      </p:sp>
-      <p:sp>
-        <p:nvSpPr>
-          <p:cNvPr id="6" name="텍스트"/>
-          <p:cNvSpPr txBox="1"/>
-          <p:nvPr/>
-        </p:nvSpPr>
-        <p:spPr>
-          <a:xfrm>
-            <a:off x="252000" y="1404000"/>
-            <a:ext cx="1656000" cy="133351"/>
-          </a:xfrm>
-          <a:prstGeom prst="rect">
-            <a:avLst/>
-          </a:prstGeom>
-          <a:noFill/>
-        </p:spPr>
-        <p:txBody>
-          <a:bodyPr wrap="square" lIns="0" rIns="0" tIns="0" bIns="0" anchor="t">
-            <a:spAutoFit/>
-          </a:bodyPr>
-          <a:lstStyle/>
-          <a:p>
-            <a:pPr algn="l">
-              <a:lnSpc>
-                <a:spcPts val="1015"/>
-              </a:lnSpc>
-            </a:pPr>
-            <a:r>
-              <a:rPr sz="700" b="1" spc="200">
-                <a:solidFill>
-                  <a:srgbClr val="6B7280"/>
-                </a:solidFill>
-                <a:latin typeface="맑은 고딕"/>
-                <a:ea typeface="맑은 고딕"/>
-              </a:rPr>
-              <a:t>기관명 · 부서명</a:t>
             </a:r>
           </a:p>
         </p:txBody>
